--- a/slides/DevPilot_Loop_preliminary.pptx
+++ b/slides/DevPilot_Loop_preliminary.pptx
@@ -6707,88 +6707,33 @@
           </a:p>
         </p:txBody>
       </p:sp>
-      <p:sp>
-        <p:nvSpPr>
-          <p:cNvPr id="5" name="Rectangle 4"/>
-          <p:cNvSpPr/>
-          <p:nvPr/>
-        </p:nvSpPr>
+      <p:pic>
+        <p:nvPicPr>
+          <p:cNvPr id="5" name="Picture 4" descr="01-devlead-intake.png"/>
+          <p:cNvPicPr>
+            <a:picLocks noChangeAspect="1"/>
+          </p:cNvPicPr>
+          <p:nvPr/>
+        </p:nvPicPr>
+        <p:blipFill>
+          <a:blip r:embed="rId2"/>
+          <a:stretch>
+            <a:fillRect/>
+          </a:stretch>
+        </p:blipFill>
         <p:spPr>
           <a:xfrm>
             <a:off x="1097280" y="1005840"/>
-            <a:ext cx="9601200" cy="4572000"/>
-          </a:xfrm>
-          <a:prstGeom prst="rect">
-            <a:avLst/>
-          </a:prstGeom>
-          <a:solidFill>
-            <a:srgbClr val="E8E8E8"/>
-          </a:solidFill>
-          <a:ln>
-            <a:solidFill>
-              <a:srgbClr val="CCCCCC"/>
-            </a:solidFill>
-          </a:ln>
-        </p:spPr>
-        <p:style>
-          <a:lnRef idx="1">
-            <a:schemeClr val="accent1"/>
-          </a:lnRef>
-          <a:fillRef idx="3">
-            <a:schemeClr val="accent1"/>
-          </a:fillRef>
-          <a:effectRef idx="2">
-            <a:schemeClr val="accent1"/>
-          </a:effectRef>
-          <a:fontRef idx="minor">
-            <a:schemeClr val="lt1"/>
-          </a:fontRef>
-        </p:style>
-        <p:txBody>
-          <a:bodyPr rtlCol="0" anchor="ctr"/>
-          <a:lstStyle/>
-          <a:p>
-            <a:pPr algn="ctr"/>
-          </a:p>
-        </p:txBody>
-      </p:sp>
+            <a:ext cx="9601200" cy="5334000"/>
+          </a:xfrm>
+          <a:prstGeom prst="rect">
+            <a:avLst/>
+          </a:prstGeom>
+        </p:spPr>
+      </p:pic>
       <p:sp>
         <p:nvSpPr>
           <p:cNvPr id="6" name="TextBox 5"/>
-          <p:cNvSpPr txBox="1"/>
-          <p:nvPr/>
-        </p:nvSpPr>
-        <p:spPr>
-          <a:xfrm>
-            <a:off x="1097280" y="2834640"/>
-            <a:ext cx="9601200" cy="457200"/>
-          </a:xfrm>
-          <a:prstGeom prst="rect">
-            <a:avLst/>
-          </a:prstGeom>
-          <a:noFill/>
-        </p:spPr>
-        <p:txBody>
-          <a:bodyPr wrap="none">
-            <a:spAutoFit/>
-          </a:bodyPr>
-          <a:lstStyle/>
-          <a:p>
-            <a:r>
-              <a:rPr sz="1400" b="0">
-                <a:solidFill>
-                  <a:srgbClr val="999999"/>
-                </a:solidFill>
-                <a:latin typeface="Microsoft YaHei"/>
-              </a:rPr>
-              <a:t>[ 图片占位：无法加载 ]</a:t>
-            </a:r>
-          </a:p>
-        </p:txBody>
-      </p:sp>
-      <p:sp>
-        <p:nvSpPr>
-          <p:cNvPr id="7" name="TextBox 6"/>
           <p:cNvSpPr txBox="1"/>
           <p:nvPr/>
         </p:nvSpPr>
@@ -10436,88 +10381,33 @@
           </a:p>
         </p:txBody>
       </p:sp>
-      <p:sp>
-        <p:nvSpPr>
-          <p:cNvPr id="5" name="Rectangle 4"/>
-          <p:cNvSpPr/>
-          <p:nvPr/>
-        </p:nvSpPr>
+      <p:pic>
+        <p:nvPicPr>
+          <p:cNvPr id="5" name="Picture 4" descr="02-intake-triage.png"/>
+          <p:cNvPicPr>
+            <a:picLocks noChangeAspect="1"/>
+          </p:cNvPicPr>
+          <p:nvPr/>
+        </p:nvPicPr>
+        <p:blipFill>
+          <a:blip r:embed="rId2"/>
+          <a:stretch>
+            <a:fillRect/>
+          </a:stretch>
+        </p:blipFill>
         <p:spPr>
           <a:xfrm>
             <a:off x="1097280" y="1005840"/>
-            <a:ext cx="9601200" cy="4572000"/>
-          </a:xfrm>
-          <a:prstGeom prst="rect">
-            <a:avLst/>
-          </a:prstGeom>
-          <a:solidFill>
-            <a:srgbClr val="E8E8E8"/>
-          </a:solidFill>
-          <a:ln>
-            <a:solidFill>
-              <a:srgbClr val="CCCCCC"/>
-            </a:solidFill>
-          </a:ln>
-        </p:spPr>
-        <p:style>
-          <a:lnRef idx="1">
-            <a:schemeClr val="accent1"/>
-          </a:lnRef>
-          <a:fillRef idx="3">
-            <a:schemeClr val="accent1"/>
-          </a:fillRef>
-          <a:effectRef idx="2">
-            <a:schemeClr val="accent1"/>
-          </a:effectRef>
-          <a:fontRef idx="minor">
-            <a:schemeClr val="lt1"/>
-          </a:fontRef>
-        </p:style>
-        <p:txBody>
-          <a:bodyPr rtlCol="0" anchor="ctr"/>
-          <a:lstStyle/>
-          <a:p>
-            <a:pPr algn="ctr"/>
-          </a:p>
-        </p:txBody>
-      </p:sp>
+            <a:ext cx="9601200" cy="5334000"/>
+          </a:xfrm>
+          <a:prstGeom prst="rect">
+            <a:avLst/>
+          </a:prstGeom>
+        </p:spPr>
+      </p:pic>
       <p:sp>
         <p:nvSpPr>
           <p:cNvPr id="6" name="TextBox 5"/>
-          <p:cNvSpPr txBox="1"/>
-          <p:nvPr/>
-        </p:nvSpPr>
-        <p:spPr>
-          <a:xfrm>
-            <a:off x="1097280" y="2834640"/>
-            <a:ext cx="9601200" cy="457200"/>
-          </a:xfrm>
-          <a:prstGeom prst="rect">
-            <a:avLst/>
-          </a:prstGeom>
-          <a:noFill/>
-        </p:spPr>
-        <p:txBody>
-          <a:bodyPr wrap="none">
-            <a:spAutoFit/>
-          </a:bodyPr>
-          <a:lstStyle/>
-          <a:p>
-            <a:r>
-              <a:rPr sz="1400" b="0">
-                <a:solidFill>
-                  <a:srgbClr val="999999"/>
-                </a:solidFill>
-                <a:latin typeface="Microsoft YaHei"/>
-              </a:rPr>
-              <a:t>[ 图片占位：无法加载 ]</a:t>
-            </a:r>
-          </a:p>
-        </p:txBody>
-      </p:sp>
-      <p:sp>
-        <p:nvSpPr>
-          <p:cNvPr id="7" name="TextBox 6"/>
           <p:cNvSpPr txBox="1"/>
           <p:nvPr/>
         </p:nvSpPr>
@@ -11680,88 +11570,33 @@
           </a:p>
         </p:txBody>
       </p:sp>
-      <p:sp>
-        <p:nvSpPr>
-          <p:cNvPr id="5" name="Rectangle 4"/>
-          <p:cNvSpPr/>
-          <p:nvPr/>
-        </p:nvSpPr>
+      <p:pic>
+        <p:nvPicPr>
+          <p:cNvPr id="5" name="Picture 4" descr="03-analyst-rootcause.png"/>
+          <p:cNvPicPr>
+            <a:picLocks noChangeAspect="1"/>
+          </p:cNvPicPr>
+          <p:nvPr/>
+        </p:nvPicPr>
+        <p:blipFill>
+          <a:blip r:embed="rId2"/>
+          <a:stretch>
+            <a:fillRect/>
+          </a:stretch>
+        </p:blipFill>
         <p:spPr>
           <a:xfrm>
             <a:off x="1097280" y="1005840"/>
-            <a:ext cx="9601200" cy="4572000"/>
-          </a:xfrm>
-          <a:prstGeom prst="rect">
-            <a:avLst/>
-          </a:prstGeom>
-          <a:solidFill>
-            <a:srgbClr val="E8E8E8"/>
-          </a:solidFill>
-          <a:ln>
-            <a:solidFill>
-              <a:srgbClr val="CCCCCC"/>
-            </a:solidFill>
-          </a:ln>
-        </p:spPr>
-        <p:style>
-          <a:lnRef idx="1">
-            <a:schemeClr val="accent1"/>
-          </a:lnRef>
-          <a:fillRef idx="3">
-            <a:schemeClr val="accent1"/>
-          </a:fillRef>
-          <a:effectRef idx="2">
-            <a:schemeClr val="accent1"/>
-          </a:effectRef>
-          <a:fontRef idx="minor">
-            <a:schemeClr val="lt1"/>
-          </a:fontRef>
-        </p:style>
-        <p:txBody>
-          <a:bodyPr rtlCol="0" anchor="ctr"/>
-          <a:lstStyle/>
-          <a:p>
-            <a:pPr algn="ctr"/>
-          </a:p>
-        </p:txBody>
-      </p:sp>
+            <a:ext cx="9601200" cy="5334000"/>
+          </a:xfrm>
+          <a:prstGeom prst="rect">
+            <a:avLst/>
+          </a:prstGeom>
+        </p:spPr>
+      </p:pic>
       <p:sp>
         <p:nvSpPr>
           <p:cNvPr id="6" name="TextBox 5"/>
-          <p:cNvSpPr txBox="1"/>
-          <p:nvPr/>
-        </p:nvSpPr>
-        <p:spPr>
-          <a:xfrm>
-            <a:off x="1097280" y="2834640"/>
-            <a:ext cx="9601200" cy="457200"/>
-          </a:xfrm>
-          <a:prstGeom prst="rect">
-            <a:avLst/>
-          </a:prstGeom>
-          <a:noFill/>
-        </p:spPr>
-        <p:txBody>
-          <a:bodyPr wrap="none">
-            <a:spAutoFit/>
-          </a:bodyPr>
-          <a:lstStyle/>
-          <a:p>
-            <a:r>
-              <a:rPr sz="1400" b="0">
-                <a:solidFill>
-                  <a:srgbClr val="999999"/>
-                </a:solidFill>
-                <a:latin typeface="Microsoft YaHei"/>
-              </a:rPr>
-              <a:t>[ 图片占位：无法加载 ]</a:t>
-            </a:r>
-          </a:p>
-        </p:txBody>
-      </p:sp>
-      <p:sp>
-        <p:nvSpPr>
-          <p:cNvPr id="7" name="TextBox 6"/>
           <p:cNvSpPr txBox="1"/>
           <p:nvPr/>
         </p:nvSpPr>
@@ -11923,88 +11758,33 @@
           </a:p>
         </p:txBody>
       </p:sp>
-      <p:sp>
-        <p:nvSpPr>
-          <p:cNvPr id="5" name="Rectangle 4"/>
-          <p:cNvSpPr/>
-          <p:nvPr/>
-        </p:nvSpPr>
+      <p:pic>
+        <p:nvPicPr>
+          <p:cNvPr id="5" name="Picture 4" descr="04-fixer-patch.png"/>
+          <p:cNvPicPr>
+            <a:picLocks noChangeAspect="1"/>
+          </p:cNvPicPr>
+          <p:nvPr/>
+        </p:nvPicPr>
+        <p:blipFill>
+          <a:blip r:embed="rId2"/>
+          <a:stretch>
+            <a:fillRect/>
+          </a:stretch>
+        </p:blipFill>
         <p:spPr>
           <a:xfrm>
             <a:off x="1097280" y="1005840"/>
-            <a:ext cx="9601200" cy="4572000"/>
-          </a:xfrm>
-          <a:prstGeom prst="rect">
-            <a:avLst/>
-          </a:prstGeom>
-          <a:solidFill>
-            <a:srgbClr val="E8E8E8"/>
-          </a:solidFill>
-          <a:ln>
-            <a:solidFill>
-              <a:srgbClr val="CCCCCC"/>
-            </a:solidFill>
-          </a:ln>
-        </p:spPr>
-        <p:style>
-          <a:lnRef idx="1">
-            <a:schemeClr val="accent1"/>
-          </a:lnRef>
-          <a:fillRef idx="3">
-            <a:schemeClr val="accent1"/>
-          </a:fillRef>
-          <a:effectRef idx="2">
-            <a:schemeClr val="accent1"/>
-          </a:effectRef>
-          <a:fontRef idx="minor">
-            <a:schemeClr val="lt1"/>
-          </a:fontRef>
-        </p:style>
-        <p:txBody>
-          <a:bodyPr rtlCol="0" anchor="ctr"/>
-          <a:lstStyle/>
-          <a:p>
-            <a:pPr algn="ctr"/>
-          </a:p>
-        </p:txBody>
-      </p:sp>
+            <a:ext cx="9601200" cy="5334000"/>
+          </a:xfrm>
+          <a:prstGeom prst="rect">
+            <a:avLst/>
+          </a:prstGeom>
+        </p:spPr>
+      </p:pic>
       <p:sp>
         <p:nvSpPr>
           <p:cNvPr id="6" name="TextBox 5"/>
-          <p:cNvSpPr txBox="1"/>
-          <p:nvPr/>
-        </p:nvSpPr>
-        <p:spPr>
-          <a:xfrm>
-            <a:off x="1097280" y="2834640"/>
-            <a:ext cx="9601200" cy="457200"/>
-          </a:xfrm>
-          <a:prstGeom prst="rect">
-            <a:avLst/>
-          </a:prstGeom>
-          <a:noFill/>
-        </p:spPr>
-        <p:txBody>
-          <a:bodyPr wrap="none">
-            <a:spAutoFit/>
-          </a:bodyPr>
-          <a:lstStyle/>
-          <a:p>
-            <a:r>
-              <a:rPr sz="1400" b="0">
-                <a:solidFill>
-                  <a:srgbClr val="999999"/>
-                </a:solidFill>
-                <a:latin typeface="Microsoft YaHei"/>
-              </a:rPr>
-              <a:t>[ 图片占位：无法加载 ]</a:t>
-            </a:r>
-          </a:p>
-        </p:txBody>
-      </p:sp>
-      <p:sp>
-        <p:nvSpPr>
-          <p:cNvPr id="7" name="TextBox 6"/>
           <p:cNvSpPr txBox="1"/>
           <p:nvPr/>
         </p:nvSpPr>
@@ -12166,88 +11946,33 @@
           </a:p>
         </p:txBody>
       </p:sp>
-      <p:sp>
-        <p:nvSpPr>
-          <p:cNvPr id="5" name="Rectangle 4"/>
-          <p:cNvSpPr/>
-          <p:nvPr/>
-        </p:nvSpPr>
+      <p:pic>
+        <p:nvPicPr>
+          <p:cNvPr id="5" name="Picture 4" descr="07-release-canary.png"/>
+          <p:cNvPicPr>
+            <a:picLocks noChangeAspect="1"/>
+          </p:cNvPicPr>
+          <p:nvPr/>
+        </p:nvPicPr>
+        <p:blipFill>
+          <a:blip r:embed="rId2"/>
+          <a:stretch>
+            <a:fillRect/>
+          </a:stretch>
+        </p:blipFill>
         <p:spPr>
           <a:xfrm>
             <a:off x="1097280" y="1005840"/>
-            <a:ext cx="9601200" cy="4572000"/>
-          </a:xfrm>
-          <a:prstGeom prst="rect">
-            <a:avLst/>
-          </a:prstGeom>
-          <a:solidFill>
-            <a:srgbClr val="E8E8E8"/>
-          </a:solidFill>
-          <a:ln>
-            <a:solidFill>
-              <a:srgbClr val="CCCCCC"/>
-            </a:solidFill>
-          </a:ln>
-        </p:spPr>
-        <p:style>
-          <a:lnRef idx="1">
-            <a:schemeClr val="accent1"/>
-          </a:lnRef>
-          <a:fillRef idx="3">
-            <a:schemeClr val="accent1"/>
-          </a:fillRef>
-          <a:effectRef idx="2">
-            <a:schemeClr val="accent1"/>
-          </a:effectRef>
-          <a:fontRef idx="minor">
-            <a:schemeClr val="lt1"/>
-          </a:fontRef>
-        </p:style>
-        <p:txBody>
-          <a:bodyPr rtlCol="0" anchor="ctr"/>
-          <a:lstStyle/>
-          <a:p>
-            <a:pPr algn="ctr"/>
-          </a:p>
-        </p:txBody>
-      </p:sp>
+            <a:ext cx="9601200" cy="5334000"/>
+          </a:xfrm>
+          <a:prstGeom prst="rect">
+            <a:avLst/>
+          </a:prstGeom>
+        </p:spPr>
+      </p:pic>
       <p:sp>
         <p:nvSpPr>
           <p:cNvPr id="6" name="TextBox 5"/>
-          <p:cNvSpPr txBox="1"/>
-          <p:nvPr/>
-        </p:nvSpPr>
-        <p:spPr>
-          <a:xfrm>
-            <a:off x="1097280" y="2834640"/>
-            <a:ext cx="9601200" cy="457200"/>
-          </a:xfrm>
-          <a:prstGeom prst="rect">
-            <a:avLst/>
-          </a:prstGeom>
-          <a:noFill/>
-        </p:spPr>
-        <p:txBody>
-          <a:bodyPr wrap="none">
-            <a:spAutoFit/>
-          </a:bodyPr>
-          <a:lstStyle/>
-          <a:p>
-            <a:r>
-              <a:rPr sz="1400" b="0">
-                <a:solidFill>
-                  <a:srgbClr val="999999"/>
-                </a:solidFill>
-                <a:latin typeface="Microsoft YaHei"/>
-              </a:rPr>
-              <a:t>[ 图片占位：无法加载 ]</a:t>
-            </a:r>
-          </a:p>
-        </p:txBody>
-      </p:sp>
-      <p:sp>
-        <p:nvSpPr>
-          <p:cNvPr id="7" name="TextBox 6"/>
           <p:cNvSpPr txBox="1"/>
           <p:nvPr/>
         </p:nvSpPr>
